--- a/docs/lab-6-customer-slide.pptx
+++ b/docs/lab-6-customer-slide.pptx
@@ -3777,7 +3777,7 @@
                 </a:solidFill>
                 <a:latin typeface="Aptos"/>
               </a:rPr>
-              <a:t>26 учебных недель, включая 2 недели без завершённых задач; состав команды и критерии готовности не меняются. Это не фактическая история SaparTravel: даты предварительные и не являются обязательством до проверки реальных данных.</a:t>
+              <a:t>15 учебных значений из примера методички, включая 2 нулевые недели. Это не фактическая скорость SaparTravel: идёт 6-я неделя, завершено не более 5 недель наблюдений. Даты только иллюстрируют метод.</a:t>
             </a:r>
           </a:p>
         </p:txBody>

--- a/docs/lab-6-customer-slide.pptx
+++ b/docs/lab-6-customer-slide.pptx
@@ -3196,7 +3196,7 @@
                 </a:solidFill>
                 <a:latin typeface="Aptos"/>
               </a:rPr>
-              <a:t>Текущий объём: 15 историй MVP  •  расчёт на 9 октября 2026</a:t>
+              <a:t>Осталось 11 MVP-карточек  •  расчёт на 9 октября 2026</a:t>
             </a:r>
           </a:p>
         </p:txBody>
@@ -3358,7 +3358,7 @@
                 </a:solidFill>
                 <a:latin typeface="Aptos"/>
               </a:rPr>
-              <a:t>6 ноября 2026</a:t>
+              <a:t>30 октября 2026</a:t>
             </a:r>
           </a:p>
         </p:txBody>
@@ -3555,7 +3555,7 @@
                 </a:solidFill>
                 <a:latin typeface="Aptos"/>
               </a:rPr>
-              <a:t>13 ноября 2026</a:t>
+              <a:t>6 ноября 2026</a:t>
             </a:r>
           </a:p>
         </p:txBody>
@@ -3590,7 +3590,7 @@
                 </a:solidFill>
                 <a:latin typeface="Aptos"/>
               </a:rPr>
-              <a:t>85 из 100 сценариев завершились не позднее этой даты</a:t>
+              <a:t>85 из 100 сценариев завершили остаток к этой дате</a:t>
             </a:r>
           </a:p>
         </p:txBody>
@@ -3707,7 +3707,7 @@
                 </a:solidFill>
                 <a:latin typeface="Aptos"/>
               </a:rPr>
-              <a:t>Планировать текущий MVP к 13 ноября. Зафиксировать объём; ST-16–ST-18 оставить за рамками релиза. Для более раннего запуска согласовать меньший срез и пересчитать срок.</a:t>
+              <a:t>Планировать оставшиеся 11 карточек к 6 ноября. Не добавлять ST-16–ST-18. Перед обещанием срока сверить статусы Project/Issues и фактический темп.</a:t>
             </a:r>
           </a:p>
         </p:txBody>
@@ -3777,7 +3777,7 @@
                 </a:solidFill>
                 <a:latin typeface="Aptos"/>
               </a:rPr>
-              <a:t>15 учебных значений из примера методички, включая 2 нулевые недели. Это не фактическая скорость SaparTravel: идёт 6-я неделя, завершено не более 5 недель наблюдений. Даты только иллюстрируют метод.</a:t>
+              <a:t>11 оставшихся карточек по статусам Project; ST-04 в Review ещё не завершена. Throughput — 15 учебных значений, не скорость команды; статусы Project/Issues расходятся.</a:t>
             </a:r>
           </a:p>
         </p:txBody>

--- a/docs/lab-6-customer-slide.pptx
+++ b/docs/lab-6-customer-slide.pptx
@@ -5,9 +5,9 @@
     <p:sldMasterId id="2147483648" r:id="rId1"/>
   </p:sldMasterIdLst>
   <p:sldIdLst>
-    <p:sldId id="256" r:id="rId7"/>
+    <p:sldId id="256" r:id="rId2"/>
   </p:sldIdLst>
-  <p:sldSz cx="12191695" cy="6858000" type="screen4x3"/>
+  <p:sldSz cx="12192000" cy="6858000"/>
   <p:notesSz cx="6858000" cy="9144000"/>
   <p:defaultTextStyle>
     <a:defPPr>
@@ -104,6 +104,22 @@
       </a:defRPr>
     </a:lvl9pPr>
   </p:defaultTextStyle>
+  <p:extLst>
+    <p:ext uri="{EFAFB233-063F-42B5-8137-9DF3F51BA10A}">
+      <p15:sldGuideLst xmlns:p15="http://schemas.microsoft.com/office/powerpoint/2012/main">
+        <p15:guide id="1" orient="horz" pos="2160">
+          <p15:clr>
+            <a:srgbClr val="A4A3A4"/>
+          </p15:clr>
+        </p15:guide>
+        <p15:guide id="2" pos="2880">
+          <p15:clr>
+            <a:srgbClr val="A4A3A4"/>
+          </p15:clr>
+        </p15:guide>
+      </p15:sldGuideLst>
+    </p:ext>
+  </p:extLst>
 </p:presentation>
 </file>
 
@@ -145,10 +161,9 @@
           <a:lstStyle/>
           <a:p>
             <a:r>
-              <a:rPr lang="en-US" smtClean="0"/>
+              <a:rPr lang="en-US"/>
               <a:t>Click to edit Master title style</a:t>
             </a:r>
-            <a:endParaRPr lang="en-US"/>
           </a:p>
         </p:txBody>
       </p:sp>
@@ -264,10 +279,9 @@
           </a:lstStyle>
           <a:p>
             <a:r>
-              <a:rPr lang="en-US" smtClean="0"/>
+              <a:rPr lang="en-US"/>
               <a:t>Click to edit Master subtitle style</a:t>
             </a:r>
-            <a:endParaRPr lang="en-US"/>
           </a:p>
         </p:txBody>
       </p:sp>
@@ -288,7 +302,7 @@
           <a:p>
             <a:fld id="{5BCAD085-E8A6-8845-BD4E-CB4CCA059FC4}" type="datetimeFigureOut">
               <a:rPr lang="en-US" smtClean="0"/>
-              <a:t>1/27/13</a:t>
+              <a:t>10/9/26</a:t>
             </a:fld>
             <a:endParaRPr lang="en-US"/>
           </a:p>
@@ -382,10 +396,9 @@
           <a:lstStyle/>
           <a:p>
             <a:r>
-              <a:rPr lang="en-US" smtClean="0"/>
+              <a:rPr lang="en-US"/>
               <a:t>Click to edit Master title style</a:t>
             </a:r>
-            <a:endParaRPr lang="en-US"/>
           </a:p>
         </p:txBody>
       </p:sp>
@@ -406,38 +419,37 @@
           <a:p>
             <a:pPr lvl="0"/>
             <a:r>
-              <a:rPr lang="en-US" smtClean="0"/>
+              <a:rPr lang="en-US"/>
               <a:t>Click to edit Master text styles</a:t>
             </a:r>
           </a:p>
           <a:p>
             <a:pPr lvl="1"/>
             <a:r>
-              <a:rPr lang="en-US" smtClean="0"/>
+              <a:rPr lang="en-US"/>
               <a:t>Second level</a:t>
             </a:r>
           </a:p>
           <a:p>
             <a:pPr lvl="2"/>
             <a:r>
-              <a:rPr lang="en-US" smtClean="0"/>
+              <a:rPr lang="en-US"/>
               <a:t>Third level</a:t>
             </a:r>
           </a:p>
           <a:p>
             <a:pPr lvl="3"/>
             <a:r>
-              <a:rPr lang="en-US" smtClean="0"/>
+              <a:rPr lang="en-US"/>
               <a:t>Fourth level</a:t>
             </a:r>
           </a:p>
           <a:p>
             <a:pPr lvl="4"/>
             <a:r>
-              <a:rPr lang="en-US" smtClean="0"/>
+              <a:rPr lang="en-US"/>
               <a:t>Fifth level</a:t>
             </a:r>
-            <a:endParaRPr lang="en-US"/>
           </a:p>
         </p:txBody>
       </p:sp>
@@ -458,7 +470,7 @@
           <a:p>
             <a:fld id="{5BCAD085-E8A6-8845-BD4E-CB4CCA059FC4}" type="datetimeFigureOut">
               <a:rPr lang="en-US" smtClean="0"/>
-              <a:t>1/27/13</a:t>
+              <a:t>10/9/26</a:t>
             </a:fld>
             <a:endParaRPr lang="en-US"/>
           </a:p>
@@ -557,10 +569,9 @@
           <a:lstStyle/>
           <a:p>
             <a:r>
-              <a:rPr lang="en-US" smtClean="0"/>
+              <a:rPr lang="en-US"/>
               <a:t>Click to edit Master title style</a:t>
             </a:r>
-            <a:endParaRPr lang="en-US"/>
           </a:p>
         </p:txBody>
       </p:sp>
@@ -586,38 +597,37 @@
           <a:p>
             <a:pPr lvl="0"/>
             <a:r>
-              <a:rPr lang="en-US" smtClean="0"/>
+              <a:rPr lang="en-US"/>
               <a:t>Click to edit Master text styles</a:t>
             </a:r>
           </a:p>
           <a:p>
             <a:pPr lvl="1"/>
             <a:r>
-              <a:rPr lang="en-US" smtClean="0"/>
+              <a:rPr lang="en-US"/>
               <a:t>Second level</a:t>
             </a:r>
           </a:p>
           <a:p>
             <a:pPr lvl="2"/>
             <a:r>
-              <a:rPr lang="en-US" smtClean="0"/>
+              <a:rPr lang="en-US"/>
               <a:t>Third level</a:t>
             </a:r>
           </a:p>
           <a:p>
             <a:pPr lvl="3"/>
             <a:r>
-              <a:rPr lang="en-US" smtClean="0"/>
+              <a:rPr lang="en-US"/>
               <a:t>Fourth level</a:t>
             </a:r>
           </a:p>
           <a:p>
             <a:pPr lvl="4"/>
             <a:r>
-              <a:rPr lang="en-US" smtClean="0"/>
+              <a:rPr lang="en-US"/>
               <a:t>Fifth level</a:t>
             </a:r>
-            <a:endParaRPr lang="en-US"/>
           </a:p>
         </p:txBody>
       </p:sp>
@@ -638,7 +648,7 @@
           <a:p>
             <a:fld id="{5BCAD085-E8A6-8845-BD4E-CB4CCA059FC4}" type="datetimeFigureOut">
               <a:rPr lang="en-US" smtClean="0"/>
-              <a:t>1/27/13</a:t>
+              <a:t>10/9/26</a:t>
             </a:fld>
             <a:endParaRPr lang="en-US"/>
           </a:p>
@@ -732,10 +742,9 @@
           <a:lstStyle/>
           <a:p>
             <a:r>
-              <a:rPr lang="en-US" smtClean="0"/>
+              <a:rPr lang="en-US"/>
               <a:t>Click to edit Master title style</a:t>
             </a:r>
-            <a:endParaRPr lang="en-US"/>
           </a:p>
         </p:txBody>
       </p:sp>
@@ -756,38 +765,37 @@
           <a:p>
             <a:pPr lvl="0"/>
             <a:r>
-              <a:rPr lang="en-US" smtClean="0"/>
+              <a:rPr lang="en-US"/>
               <a:t>Click to edit Master text styles</a:t>
             </a:r>
           </a:p>
           <a:p>
             <a:pPr lvl="1"/>
             <a:r>
-              <a:rPr lang="en-US" smtClean="0"/>
+              <a:rPr lang="en-US"/>
               <a:t>Second level</a:t>
             </a:r>
           </a:p>
           <a:p>
             <a:pPr lvl="2"/>
             <a:r>
-              <a:rPr lang="en-US" smtClean="0"/>
+              <a:rPr lang="en-US"/>
               <a:t>Third level</a:t>
             </a:r>
           </a:p>
           <a:p>
             <a:pPr lvl="3"/>
             <a:r>
-              <a:rPr lang="en-US" smtClean="0"/>
+              <a:rPr lang="en-US"/>
               <a:t>Fourth level</a:t>
             </a:r>
           </a:p>
           <a:p>
             <a:pPr lvl="4"/>
             <a:r>
-              <a:rPr lang="en-US" smtClean="0"/>
+              <a:rPr lang="en-US"/>
               <a:t>Fifth level</a:t>
             </a:r>
-            <a:endParaRPr lang="en-US"/>
           </a:p>
         </p:txBody>
       </p:sp>
@@ -808,7 +816,7 @@
           <a:p>
             <a:fld id="{5BCAD085-E8A6-8845-BD4E-CB4CCA059FC4}" type="datetimeFigureOut">
               <a:rPr lang="en-US" smtClean="0"/>
-              <a:t>1/27/13</a:t>
+              <a:t>10/9/26</a:t>
             </a:fld>
             <a:endParaRPr lang="en-US"/>
           </a:p>
@@ -911,10 +919,9 @@
           </a:lstStyle>
           <a:p>
             <a:r>
-              <a:rPr lang="en-US" smtClean="0"/>
+              <a:rPr lang="en-US"/>
               <a:t>Click to edit Master title style</a:t>
             </a:r>
-            <a:endParaRPr lang="en-US"/>
           </a:p>
         </p:txBody>
       </p:sp>
@@ -1031,7 +1038,7 @@
           <a:p>
             <a:pPr lvl="0"/>
             <a:r>
-              <a:rPr lang="en-US" smtClean="0"/>
+              <a:rPr lang="en-US"/>
               <a:t>Click to edit Master text styles</a:t>
             </a:r>
           </a:p>
@@ -1054,7 +1061,7 @@
           <a:p>
             <a:fld id="{5BCAD085-E8A6-8845-BD4E-CB4CCA059FC4}" type="datetimeFigureOut">
               <a:rPr lang="en-US" smtClean="0"/>
-              <a:t>1/27/13</a:t>
+              <a:t>10/9/26</a:t>
             </a:fld>
             <a:endParaRPr lang="en-US"/>
           </a:p>
@@ -1148,10 +1155,9 @@
           <a:lstStyle/>
           <a:p>
             <a:r>
-              <a:rPr lang="en-US" smtClean="0"/>
+              <a:rPr lang="en-US"/>
               <a:t>Click to edit Master title style</a:t>
             </a:r>
-            <a:endParaRPr lang="en-US"/>
           </a:p>
         </p:txBody>
       </p:sp>
@@ -1205,38 +1211,37 @@
           <a:p>
             <a:pPr lvl="0"/>
             <a:r>
-              <a:rPr lang="en-US" smtClean="0"/>
+              <a:rPr lang="en-US"/>
               <a:t>Click to edit Master text styles</a:t>
             </a:r>
           </a:p>
           <a:p>
             <a:pPr lvl="1"/>
             <a:r>
-              <a:rPr lang="en-US" smtClean="0"/>
+              <a:rPr lang="en-US"/>
               <a:t>Second level</a:t>
             </a:r>
           </a:p>
           <a:p>
             <a:pPr lvl="2"/>
             <a:r>
-              <a:rPr lang="en-US" smtClean="0"/>
+              <a:rPr lang="en-US"/>
               <a:t>Third level</a:t>
             </a:r>
           </a:p>
           <a:p>
             <a:pPr lvl="3"/>
             <a:r>
-              <a:rPr lang="en-US" smtClean="0"/>
+              <a:rPr lang="en-US"/>
               <a:t>Fourth level</a:t>
             </a:r>
           </a:p>
           <a:p>
             <a:pPr lvl="4"/>
             <a:r>
-              <a:rPr lang="en-US" smtClean="0"/>
+              <a:rPr lang="en-US"/>
               <a:t>Fifth level</a:t>
             </a:r>
-            <a:endParaRPr lang="en-US"/>
           </a:p>
         </p:txBody>
       </p:sp>
@@ -1290,38 +1295,37 @@
           <a:p>
             <a:pPr lvl="0"/>
             <a:r>
-              <a:rPr lang="en-US" smtClean="0"/>
+              <a:rPr lang="en-US"/>
               <a:t>Click to edit Master text styles</a:t>
             </a:r>
           </a:p>
           <a:p>
             <a:pPr lvl="1"/>
             <a:r>
-              <a:rPr lang="en-US" smtClean="0"/>
+              <a:rPr lang="en-US"/>
               <a:t>Second level</a:t>
             </a:r>
           </a:p>
           <a:p>
             <a:pPr lvl="2"/>
             <a:r>
-              <a:rPr lang="en-US" smtClean="0"/>
+              <a:rPr lang="en-US"/>
               <a:t>Third level</a:t>
             </a:r>
           </a:p>
           <a:p>
             <a:pPr lvl="3"/>
             <a:r>
-              <a:rPr lang="en-US" smtClean="0"/>
+              <a:rPr lang="en-US"/>
               <a:t>Fourth level</a:t>
             </a:r>
           </a:p>
           <a:p>
             <a:pPr lvl="4"/>
             <a:r>
-              <a:rPr lang="en-US" smtClean="0"/>
+              <a:rPr lang="en-US"/>
               <a:t>Fifth level</a:t>
             </a:r>
-            <a:endParaRPr lang="en-US"/>
           </a:p>
         </p:txBody>
       </p:sp>
@@ -1342,7 +1346,7 @@
           <a:p>
             <a:fld id="{5BCAD085-E8A6-8845-BD4E-CB4CCA059FC4}" type="datetimeFigureOut">
               <a:rPr lang="en-US" smtClean="0"/>
-              <a:t>1/27/13</a:t>
+              <a:t>10/9/26</a:t>
             </a:fld>
             <a:endParaRPr lang="en-US"/>
           </a:p>
@@ -1440,10 +1444,9 @@
           </a:lstStyle>
           <a:p>
             <a:r>
-              <a:rPr lang="en-US" smtClean="0"/>
+              <a:rPr lang="en-US"/>
               <a:t>Click to edit Master title style</a:t>
             </a:r>
-            <a:endParaRPr lang="en-US"/>
           </a:p>
         </p:txBody>
       </p:sp>
@@ -1506,7 +1509,7 @@
           <a:p>
             <a:pPr lvl="0"/>
             <a:r>
-              <a:rPr lang="en-US" smtClean="0"/>
+              <a:rPr lang="en-US"/>
               <a:t>Click to edit Master text styles</a:t>
             </a:r>
           </a:p>
@@ -1562,38 +1565,37 @@
           <a:p>
             <a:pPr lvl="0"/>
             <a:r>
-              <a:rPr lang="en-US" smtClean="0"/>
+              <a:rPr lang="en-US"/>
               <a:t>Click to edit Master text styles</a:t>
             </a:r>
           </a:p>
           <a:p>
             <a:pPr lvl="1"/>
             <a:r>
-              <a:rPr lang="en-US" smtClean="0"/>
+              <a:rPr lang="en-US"/>
               <a:t>Second level</a:t>
             </a:r>
           </a:p>
           <a:p>
             <a:pPr lvl="2"/>
             <a:r>
-              <a:rPr lang="en-US" smtClean="0"/>
+              <a:rPr lang="en-US"/>
               <a:t>Third level</a:t>
             </a:r>
           </a:p>
           <a:p>
             <a:pPr lvl="3"/>
             <a:r>
-              <a:rPr lang="en-US" smtClean="0"/>
+              <a:rPr lang="en-US"/>
               <a:t>Fourth level</a:t>
             </a:r>
           </a:p>
           <a:p>
             <a:pPr lvl="4"/>
             <a:r>
-              <a:rPr lang="en-US" smtClean="0"/>
+              <a:rPr lang="en-US"/>
               <a:t>Fifth level</a:t>
             </a:r>
-            <a:endParaRPr lang="en-US"/>
           </a:p>
         </p:txBody>
       </p:sp>
@@ -1656,7 +1658,7 @@
           <a:p>
             <a:pPr lvl="0"/>
             <a:r>
-              <a:rPr lang="en-US" smtClean="0"/>
+              <a:rPr lang="en-US"/>
               <a:t>Click to edit Master text styles</a:t>
             </a:r>
           </a:p>
@@ -1712,38 +1714,37 @@
           <a:p>
             <a:pPr lvl="0"/>
             <a:r>
-              <a:rPr lang="en-US" smtClean="0"/>
+              <a:rPr lang="en-US"/>
               <a:t>Click to edit Master text styles</a:t>
             </a:r>
           </a:p>
           <a:p>
             <a:pPr lvl="1"/>
             <a:r>
-              <a:rPr lang="en-US" smtClean="0"/>
+              <a:rPr lang="en-US"/>
               <a:t>Second level</a:t>
             </a:r>
           </a:p>
           <a:p>
             <a:pPr lvl="2"/>
             <a:r>
-              <a:rPr lang="en-US" smtClean="0"/>
+              <a:rPr lang="en-US"/>
               <a:t>Third level</a:t>
             </a:r>
           </a:p>
           <a:p>
             <a:pPr lvl="3"/>
             <a:r>
-              <a:rPr lang="en-US" smtClean="0"/>
+              <a:rPr lang="en-US"/>
               <a:t>Fourth level</a:t>
             </a:r>
           </a:p>
           <a:p>
             <a:pPr lvl="4"/>
             <a:r>
-              <a:rPr lang="en-US" smtClean="0"/>
+              <a:rPr lang="en-US"/>
               <a:t>Fifth level</a:t>
             </a:r>
-            <a:endParaRPr lang="en-US"/>
           </a:p>
         </p:txBody>
       </p:sp>
@@ -1764,7 +1765,7 @@
           <a:p>
             <a:fld id="{5BCAD085-E8A6-8845-BD4E-CB4CCA059FC4}" type="datetimeFigureOut">
               <a:rPr lang="en-US" smtClean="0"/>
-              <a:t>1/27/13</a:t>
+              <a:t>10/9/26</a:t>
             </a:fld>
             <a:endParaRPr lang="en-US"/>
           </a:p>
@@ -1858,10 +1859,9 @@
           <a:lstStyle/>
           <a:p>
             <a:r>
-              <a:rPr lang="en-US" smtClean="0"/>
+              <a:rPr lang="en-US"/>
               <a:t>Click to edit Master title style</a:t>
             </a:r>
-            <a:endParaRPr lang="en-US"/>
           </a:p>
         </p:txBody>
       </p:sp>
@@ -1882,7 +1882,7 @@
           <a:p>
             <a:fld id="{5BCAD085-E8A6-8845-BD4E-CB4CCA059FC4}" type="datetimeFigureOut">
               <a:rPr lang="en-US" smtClean="0"/>
-              <a:t>1/27/13</a:t>
+              <a:t>10/9/26</a:t>
             </a:fld>
             <a:endParaRPr lang="en-US"/>
           </a:p>
@@ -1977,7 +1977,7 @@
           <a:p>
             <a:fld id="{5BCAD085-E8A6-8845-BD4E-CB4CCA059FC4}" type="datetimeFigureOut">
               <a:rPr lang="en-US" smtClean="0"/>
-              <a:t>1/27/13</a:t>
+              <a:t>10/9/26</a:t>
             </a:fld>
             <a:endParaRPr lang="en-US"/>
           </a:p>
@@ -2080,10 +2080,9 @@
           </a:lstStyle>
           <a:p>
             <a:r>
-              <a:rPr lang="en-US" smtClean="0"/>
+              <a:rPr lang="en-US"/>
               <a:t>Click to edit Master title style</a:t>
             </a:r>
-            <a:endParaRPr lang="en-US"/>
           </a:p>
         </p:txBody>
       </p:sp>
@@ -2137,38 +2136,37 @@
           <a:p>
             <a:pPr lvl="0"/>
             <a:r>
-              <a:rPr lang="en-US" smtClean="0"/>
+              <a:rPr lang="en-US"/>
               <a:t>Click to edit Master text styles</a:t>
             </a:r>
           </a:p>
           <a:p>
             <a:pPr lvl="1"/>
             <a:r>
-              <a:rPr lang="en-US" smtClean="0"/>
+              <a:rPr lang="en-US"/>
               <a:t>Second level</a:t>
             </a:r>
           </a:p>
           <a:p>
             <a:pPr lvl="2"/>
             <a:r>
-              <a:rPr lang="en-US" smtClean="0"/>
+              <a:rPr lang="en-US"/>
               <a:t>Third level</a:t>
             </a:r>
           </a:p>
           <a:p>
             <a:pPr lvl="3"/>
             <a:r>
-              <a:rPr lang="en-US" smtClean="0"/>
+              <a:rPr lang="en-US"/>
               <a:t>Fourth level</a:t>
             </a:r>
           </a:p>
           <a:p>
             <a:pPr lvl="4"/>
             <a:r>
-              <a:rPr lang="en-US" smtClean="0"/>
+              <a:rPr lang="en-US"/>
               <a:t>Fifth level</a:t>
             </a:r>
-            <a:endParaRPr lang="en-US"/>
           </a:p>
         </p:txBody>
       </p:sp>
@@ -2231,7 +2229,7 @@
           <a:p>
             <a:pPr lvl="0"/>
             <a:r>
-              <a:rPr lang="en-US" smtClean="0"/>
+              <a:rPr lang="en-US"/>
               <a:t>Click to edit Master text styles</a:t>
             </a:r>
           </a:p>
@@ -2254,7 +2252,7 @@
           <a:p>
             <a:fld id="{5BCAD085-E8A6-8845-BD4E-CB4CCA059FC4}" type="datetimeFigureOut">
               <a:rPr lang="en-US" smtClean="0"/>
-              <a:t>1/27/13</a:t>
+              <a:t>10/9/26</a:t>
             </a:fld>
             <a:endParaRPr lang="en-US"/>
           </a:p>
@@ -2357,10 +2355,9 @@
           </a:lstStyle>
           <a:p>
             <a:r>
-              <a:rPr lang="en-US" smtClean="0"/>
+              <a:rPr lang="en-US"/>
               <a:t>Click to edit Master title style</a:t>
             </a:r>
-            <a:endParaRPr lang="en-US"/>
           </a:p>
         </p:txBody>
       </p:sp>
@@ -2484,7 +2481,7 @@
           <a:p>
             <a:pPr lvl="0"/>
             <a:r>
-              <a:rPr lang="en-US" smtClean="0"/>
+              <a:rPr lang="en-US"/>
               <a:t>Click to edit Master text styles</a:t>
             </a:r>
           </a:p>
@@ -2507,7 +2504,7 @@
           <a:p>
             <a:fld id="{5BCAD085-E8A6-8845-BD4E-CB4CCA059FC4}" type="datetimeFigureOut">
               <a:rPr lang="en-US" smtClean="0"/>
-              <a:t>1/27/13</a:t>
+              <a:t>10/9/26</a:t>
             </a:fld>
             <a:endParaRPr lang="en-US"/>
           </a:p>
@@ -2616,10 +2613,9 @@
           <a:lstStyle/>
           <a:p>
             <a:r>
-              <a:rPr lang="en-US" smtClean="0"/>
+              <a:rPr lang="en-US"/>
               <a:t>Click to edit Master title style</a:t>
             </a:r>
-            <a:endParaRPr lang="en-US"/>
           </a:p>
         </p:txBody>
       </p:sp>
@@ -2650,38 +2646,37 @@
           <a:p>
             <a:pPr lvl="0"/>
             <a:r>
-              <a:rPr lang="en-US" smtClean="0"/>
+              <a:rPr lang="en-US"/>
               <a:t>Click to edit Master text styles</a:t>
             </a:r>
           </a:p>
           <a:p>
             <a:pPr lvl="1"/>
             <a:r>
-              <a:rPr lang="en-US" smtClean="0"/>
+              <a:rPr lang="en-US"/>
               <a:t>Second level</a:t>
             </a:r>
           </a:p>
           <a:p>
             <a:pPr lvl="2"/>
             <a:r>
-              <a:rPr lang="en-US" smtClean="0"/>
+              <a:rPr lang="en-US"/>
               <a:t>Third level</a:t>
             </a:r>
           </a:p>
           <a:p>
             <a:pPr lvl="3"/>
             <a:r>
-              <a:rPr lang="en-US" smtClean="0"/>
+              <a:rPr lang="en-US"/>
               <a:t>Fourth level</a:t>
             </a:r>
           </a:p>
           <a:p>
             <a:pPr lvl="4"/>
             <a:r>
-              <a:rPr lang="en-US" smtClean="0"/>
+              <a:rPr lang="en-US"/>
               <a:t>Fifth level</a:t>
             </a:r>
-            <a:endParaRPr lang="en-US"/>
           </a:p>
         </p:txBody>
       </p:sp>
@@ -2720,7 +2715,7 @@
           <a:p>
             <a:fld id="{5BCAD085-E8A6-8845-BD4E-CB4CCA059FC4}" type="datetimeFigureOut">
               <a:rPr lang="en-US" smtClean="0"/>
-              <a:t>1/27/13</a:t>
+              <a:t>10/9/26</a:t>
             </a:fld>
             <a:endParaRPr lang="en-US"/>
           </a:p>
@@ -3079,7 +3074,7 @@
 </file>
 
 <file path=ppt/slides/slide1.xml><?xml version="1.0" encoding="utf-8"?>
-<p:sld xmlns:a="http://schemas.openxmlformats.org/drawingml/2006/main" xmlns:p="http://schemas.openxmlformats.org/presentationml/2006/main" xmlns:r="http://schemas.openxmlformats.org/officeDocument/2006/relationships">
+<p:sld xmlns:a="http://schemas.openxmlformats.org/drawingml/2006/main" xmlns:r="http://schemas.openxmlformats.org/officeDocument/2006/relationships" xmlns:p="http://schemas.openxmlformats.org/presentationml/2006/main">
   <p:cSld>
     <p:bg>
       <p:bgPr>
@@ -3095,7 +3090,14 @@
         <p:cNvGrpSpPr/>
         <p:nvPr/>
       </p:nvGrpSpPr>
-      <p:grpSpPr/>
+      <p:grpSpPr>
+        <a:xfrm>
+          <a:off x="0" y="0"/>
+          <a:ext cx="0" cy="0"/>
+          <a:chOff x="0" y="0"/>
+          <a:chExt cx="0" cy="0"/>
+        </a:xfrm>
+      </p:grpSpPr>
       <p:sp>
         <p:nvSpPr>
           <p:cNvPr id="2" name="TextBox 1"/>
@@ -3113,7 +3115,7 @@
           <a:noFill/>
         </p:spPr>
         <p:txBody>
-          <a:bodyPr wrap="none" lIns="0" rIns="0" tIns="0" bIns="0" anchor="ctr">
+          <a:bodyPr wrap="none" lIns="0" tIns="0" rIns="0" bIns="0" anchor="ctr">
             <a:spAutoFit/>
           </a:bodyPr>
           <a:lstStyle/>
@@ -3148,7 +3150,7 @@
           <a:noFill/>
         </p:spPr>
         <p:txBody>
-          <a:bodyPr wrap="none" lIns="0" rIns="0" tIns="0" bIns="0" anchor="ctr">
+          <a:bodyPr wrap="none" lIns="0" tIns="0" rIns="0" bIns="0" anchor="ctr">
             <a:spAutoFit/>
           </a:bodyPr>
           <a:lstStyle/>
@@ -3183,7 +3185,7 @@
           <a:noFill/>
         </p:spPr>
         <p:txBody>
-          <a:bodyPr wrap="none" lIns="0" rIns="0" tIns="0" bIns="0" anchor="ctr">
+          <a:bodyPr wrap="none" lIns="0" tIns="0" rIns="0" bIns="0" anchor="ctr">
             <a:spAutoFit/>
           </a:bodyPr>
           <a:lstStyle/>
@@ -3245,6 +3247,7 @@
           <a:lstStyle/>
           <a:p>
             <a:pPr algn="ctr"/>
+            <a:endParaRPr/>
           </a:p>
         </p:txBody>
       </p:sp>
@@ -3290,6 +3293,7 @@
           <a:lstStyle/>
           <a:p>
             <a:pPr algn="ctr"/>
+            <a:endParaRPr/>
           </a:p>
         </p:txBody>
       </p:sp>
@@ -3310,7 +3314,7 @@
           <a:noFill/>
         </p:spPr>
         <p:txBody>
-          <a:bodyPr wrap="none" lIns="0" rIns="0" tIns="0" bIns="0" anchor="ctr">
+          <a:bodyPr wrap="none" lIns="0" tIns="0" rIns="0" bIns="0" anchor="ctr">
             <a:spAutoFit/>
           </a:bodyPr>
           <a:lstStyle/>
@@ -3345,7 +3349,7 @@
           <a:noFill/>
         </p:spPr>
         <p:txBody>
-          <a:bodyPr wrap="none" lIns="0" rIns="0" tIns="0" bIns="0" anchor="ctr">
+          <a:bodyPr wrap="none" lIns="0" tIns="0" rIns="0" bIns="0" anchor="ctr">
             <a:spAutoFit/>
           </a:bodyPr>
           <a:lstStyle/>
@@ -3380,7 +3384,7 @@
           <a:noFill/>
         </p:spPr>
         <p:txBody>
-          <a:bodyPr wrap="none" lIns="0" rIns="0" tIns="0" bIns="0" anchor="ctr">
+          <a:bodyPr wrap="none" lIns="0" tIns="0" rIns="0" bIns="0" anchor="ctr">
             <a:spAutoFit/>
           </a:bodyPr>
           <a:lstStyle/>
@@ -3442,6 +3446,7 @@
           <a:lstStyle/>
           <a:p>
             <a:pPr algn="ctr"/>
+            <a:endParaRPr/>
           </a:p>
         </p:txBody>
       </p:sp>
@@ -3487,6 +3492,7 @@
           <a:lstStyle/>
           <a:p>
             <a:pPr algn="ctr"/>
+            <a:endParaRPr/>
           </a:p>
         </p:txBody>
       </p:sp>
@@ -3507,7 +3513,7 @@
           <a:noFill/>
         </p:spPr>
         <p:txBody>
-          <a:bodyPr wrap="none" lIns="0" rIns="0" tIns="0" bIns="0" anchor="ctr">
+          <a:bodyPr wrap="none" lIns="0" tIns="0" rIns="0" bIns="0" anchor="ctr">
             <a:spAutoFit/>
           </a:bodyPr>
           <a:lstStyle/>
@@ -3542,7 +3548,7 @@
           <a:noFill/>
         </p:spPr>
         <p:txBody>
-          <a:bodyPr wrap="none" lIns="0" rIns="0" tIns="0" bIns="0" anchor="ctr">
+          <a:bodyPr wrap="none" lIns="0" tIns="0" rIns="0" bIns="0" anchor="ctr">
             <a:spAutoFit/>
           </a:bodyPr>
           <a:lstStyle/>
@@ -3577,7 +3583,7 @@
           <a:noFill/>
         </p:spPr>
         <p:txBody>
-          <a:bodyPr wrap="none" lIns="0" rIns="0" tIns="0" bIns="0" anchor="ctr">
+          <a:bodyPr wrap="none" lIns="0" tIns="0" rIns="0" bIns="0" anchor="ctr">
             <a:spAutoFit/>
           </a:bodyPr>
           <a:lstStyle/>
@@ -3612,7 +3618,7 @@
           <a:noFill/>
         </p:spPr>
         <p:txBody>
-          <a:bodyPr wrap="none" lIns="0" rIns="0" tIns="0" bIns="0" anchor="ctr">
+          <a:bodyPr wrap="none" lIns="0" tIns="0" rIns="0" bIns="0" anchor="ctr">
             <a:spAutoFit/>
           </a:bodyPr>
           <a:lstStyle/>
@@ -3674,6 +3680,7 @@
           <a:lstStyle/>
           <a:p>
             <a:pPr algn="ctr"/>
+            <a:endParaRPr/>
           </a:p>
         </p:txBody>
       </p:sp>
@@ -3685,8 +3692,8 @@
         </p:nvSpPr>
         <p:spPr>
           <a:xfrm>
-            <a:off x="932688" y="3675887"/>
-            <a:ext cx="10287000" cy="658368"/>
+            <a:off x="932688" y="3774238"/>
+            <a:ext cx="9993826" cy="461665"/>
           </a:xfrm>
           <a:prstGeom prst="rect">
             <a:avLst/>
@@ -3694,20 +3701,272 @@
           <a:noFill/>
         </p:spPr>
         <p:txBody>
-          <a:bodyPr wrap="none" lIns="0" rIns="0" tIns="0" bIns="0" anchor="ctr">
+          <a:bodyPr wrap="none" lIns="0" tIns="0" rIns="0" bIns="0" anchor="ctr">
             <a:spAutoFit/>
           </a:bodyPr>
           <a:lstStyle/>
           <a:p>
             <a:pPr algn="l"/>
             <a:r>
-              <a:rPr sz="1500" b="1">
+              <a:rPr sz="1500" b="1" dirty="0" err="1">
                 <a:solidFill>
                   <a:srgbClr val="FFFFFF"/>
                 </a:solidFill>
                 <a:latin typeface="Aptos"/>
               </a:rPr>
-              <a:t>Планировать оставшиеся 11 карточек к 6 ноября. Не добавлять ST-16–ST-18. Перед обещанием срока сверить статусы Project/Issues и фактический темп.</a:t>
+              <a:t>Планировать</a:t>
+            </a:r>
+            <a:r>
+              <a:rPr sz="1500" b="1" dirty="0">
+                <a:solidFill>
+                  <a:srgbClr val="FFFFFF"/>
+                </a:solidFill>
+                <a:latin typeface="Aptos"/>
+              </a:rPr>
+              <a:t> </a:t>
+            </a:r>
+            <a:r>
+              <a:rPr sz="1500" b="1" dirty="0" err="1">
+                <a:solidFill>
+                  <a:srgbClr val="FFFFFF"/>
+                </a:solidFill>
+                <a:latin typeface="Aptos"/>
+              </a:rPr>
+              <a:t>оставшиеся</a:t>
+            </a:r>
+            <a:r>
+              <a:rPr sz="1500" b="1" dirty="0">
+                <a:solidFill>
+                  <a:srgbClr val="FFFFFF"/>
+                </a:solidFill>
+                <a:latin typeface="Aptos"/>
+              </a:rPr>
+              <a:t> 11 </a:t>
+            </a:r>
+            <a:r>
+              <a:rPr sz="1500" b="1" dirty="0" err="1">
+                <a:solidFill>
+                  <a:srgbClr val="FFFFFF"/>
+                </a:solidFill>
+                <a:latin typeface="Aptos"/>
+              </a:rPr>
+              <a:t>карточек</a:t>
+            </a:r>
+            <a:r>
+              <a:rPr sz="1500" b="1" dirty="0">
+                <a:solidFill>
+                  <a:srgbClr val="FFFFFF"/>
+                </a:solidFill>
+                <a:latin typeface="Aptos"/>
+              </a:rPr>
+              <a:t> </a:t>
+            </a:r>
+            <a:r>
+              <a:rPr sz="1500" b="1" dirty="0" err="1">
+                <a:solidFill>
+                  <a:srgbClr val="FFFFFF"/>
+                </a:solidFill>
+                <a:latin typeface="Aptos"/>
+              </a:rPr>
+              <a:t>к</a:t>
+            </a:r>
+            <a:r>
+              <a:rPr sz="1500" b="1" dirty="0">
+                <a:solidFill>
+                  <a:srgbClr val="FFFFFF"/>
+                </a:solidFill>
+                <a:latin typeface="Aptos"/>
+              </a:rPr>
+              <a:t> 6 </a:t>
+            </a:r>
+            <a:r>
+              <a:rPr sz="1500" b="1" dirty="0" err="1">
+                <a:solidFill>
+                  <a:srgbClr val="FFFFFF"/>
+                </a:solidFill>
+                <a:latin typeface="Aptos"/>
+              </a:rPr>
+              <a:t>ноября</a:t>
+            </a:r>
+            <a:r>
+              <a:rPr sz="1500" b="1" dirty="0">
+                <a:solidFill>
+                  <a:srgbClr val="FFFFFF"/>
+                </a:solidFill>
+                <a:latin typeface="Aptos"/>
+              </a:rPr>
+              <a:t>. </a:t>
+            </a:r>
+            <a:r>
+              <a:rPr sz="1500" b="1" dirty="0" err="1">
+                <a:solidFill>
+                  <a:srgbClr val="FFFFFF"/>
+                </a:solidFill>
+                <a:latin typeface="Aptos"/>
+              </a:rPr>
+              <a:t>Не</a:t>
+            </a:r>
+            <a:r>
+              <a:rPr sz="1500" b="1" dirty="0">
+                <a:solidFill>
+                  <a:srgbClr val="FFFFFF"/>
+                </a:solidFill>
+                <a:latin typeface="Aptos"/>
+              </a:rPr>
+              <a:t> </a:t>
+            </a:r>
+            <a:r>
+              <a:rPr sz="1500" b="1" dirty="0" err="1">
+                <a:solidFill>
+                  <a:srgbClr val="FFFFFF"/>
+                </a:solidFill>
+                <a:latin typeface="Aptos"/>
+              </a:rPr>
+              <a:t>добавлять</a:t>
+            </a:r>
+            <a:r>
+              <a:rPr sz="1500" b="1" dirty="0">
+                <a:solidFill>
+                  <a:srgbClr val="FFFFFF"/>
+                </a:solidFill>
+                <a:latin typeface="Aptos"/>
+              </a:rPr>
+              <a:t> ST-16–ST-18. Перед </a:t>
+            </a:r>
+            <a:r>
+              <a:rPr sz="1500" b="1" dirty="0" err="1">
+                <a:solidFill>
+                  <a:srgbClr val="FFFFFF"/>
+                </a:solidFill>
+                <a:latin typeface="Aptos"/>
+              </a:rPr>
+              <a:t>обещанием</a:t>
+            </a:r>
+            <a:r>
+              <a:rPr sz="1500" b="1" dirty="0">
+                <a:solidFill>
+                  <a:srgbClr val="FFFFFF"/>
+                </a:solidFill>
+                <a:latin typeface="Aptos"/>
+              </a:rPr>
+              <a:t> </a:t>
+            </a:r>
+            <a:r>
+              <a:rPr sz="1500" b="1" dirty="0" err="1">
+                <a:solidFill>
+                  <a:srgbClr val="FFFFFF"/>
+                </a:solidFill>
+                <a:latin typeface="Aptos"/>
+              </a:rPr>
+              <a:t>срока</a:t>
+            </a:r>
+            <a:r>
+              <a:rPr sz="1500" b="1" dirty="0">
+                <a:solidFill>
+                  <a:srgbClr val="FFFFFF"/>
+                </a:solidFill>
+                <a:latin typeface="Aptos"/>
+              </a:rPr>
+              <a:t> </a:t>
+            </a:r>
+            <a:r>
+              <a:rPr sz="1500" b="1" dirty="0" err="1">
+                <a:solidFill>
+                  <a:srgbClr val="FFFFFF"/>
+                </a:solidFill>
+                <a:latin typeface="Aptos"/>
+              </a:rPr>
+              <a:t>сверить</a:t>
+            </a:r>
+            <a:r>
+              <a:rPr sz="1500" b="1" dirty="0">
+                <a:solidFill>
+                  <a:srgbClr val="FFFFFF"/>
+                </a:solidFill>
+                <a:latin typeface="Aptos"/>
+              </a:rPr>
+              <a:t> </a:t>
+            </a:r>
+            <a:endParaRPr lang="en-US" sz="1500" b="1" dirty="0">
+              <a:solidFill>
+                <a:srgbClr val="FFFFFF"/>
+              </a:solidFill>
+              <a:latin typeface="Aptos"/>
+            </a:endParaRPr>
+          </a:p>
+          <a:p>
+            <a:pPr algn="l"/>
+            <a:r>
+              <a:rPr sz="1500" b="1" dirty="0" err="1">
+                <a:solidFill>
+                  <a:srgbClr val="FFFFFF"/>
+                </a:solidFill>
+                <a:latin typeface="Aptos"/>
+              </a:rPr>
+              <a:t>статусы</a:t>
+            </a:r>
+            <a:r>
+              <a:rPr sz="1500" b="1" dirty="0">
+                <a:solidFill>
+                  <a:srgbClr val="FFFFFF"/>
+                </a:solidFill>
+                <a:latin typeface="Aptos"/>
+              </a:rPr>
+              <a:t> Project/Issues </a:t>
+            </a:r>
+            <a:r>
+              <a:rPr sz="1500" b="1" dirty="0" err="1">
+                <a:solidFill>
+                  <a:srgbClr val="FFFFFF"/>
+                </a:solidFill>
+                <a:latin typeface="Aptos"/>
+              </a:rPr>
+              <a:t>и</a:t>
+            </a:r>
+            <a:r>
+              <a:rPr sz="1500" b="1" dirty="0">
+                <a:solidFill>
+                  <a:srgbClr val="FFFFFF"/>
+                </a:solidFill>
+                <a:latin typeface="Aptos"/>
+              </a:rPr>
+              <a:t> </a:t>
+            </a:r>
+            <a:r>
+              <a:rPr sz="1500" b="1" dirty="0" err="1">
+                <a:solidFill>
+                  <a:srgbClr val="FFFFFF"/>
+                </a:solidFill>
+                <a:latin typeface="Aptos"/>
+              </a:rPr>
+              <a:t>фактический</a:t>
+            </a:r>
+            <a:r>
+              <a:rPr sz="1500" b="1" dirty="0">
+                <a:solidFill>
+                  <a:srgbClr val="FFFFFF"/>
+                </a:solidFill>
+                <a:latin typeface="Aptos"/>
+              </a:rPr>
+              <a:t> </a:t>
+            </a:r>
+            <a:r>
+              <a:rPr sz="1500" b="1" dirty="0" err="1">
+                <a:solidFill>
+                  <a:srgbClr val="FFFFFF"/>
+                </a:solidFill>
+                <a:latin typeface="Aptos"/>
+              </a:rPr>
+              <a:t>темп</a:t>
+            </a:r>
+            <a:r>
+              <a:rPr sz="1500" b="1" dirty="0">
+                <a:solidFill>
+                  <a:srgbClr val="FFFFFF"/>
+                </a:solidFill>
+                <a:latin typeface="Aptos"/>
+              </a:rPr>
+              <a:t>.</a:t>
             </a:r>
           </a:p>
         </p:txBody>
@@ -3729,7 +3988,7 @@
           <a:noFill/>
         </p:spPr>
         <p:txBody>
-          <a:bodyPr wrap="none" lIns="0" rIns="0" tIns="0" bIns="0" anchor="ctr">
+          <a:bodyPr wrap="none" lIns="0" tIns="0" rIns="0" bIns="0" anchor="ctr">
             <a:spAutoFit/>
           </a:bodyPr>
           <a:lstStyle/>
@@ -3755,8 +4014,8 @@
         </p:nvSpPr>
         <p:spPr>
           <a:xfrm>
-            <a:off x="676656" y="5056632"/>
-            <a:ext cx="6629400" cy="804672"/>
+            <a:off x="676656" y="5274302"/>
+            <a:ext cx="6464014" cy="369332"/>
           </a:xfrm>
           <a:prstGeom prst="rect">
             <a:avLst/>
@@ -3764,20 +4023,308 @@
           <a:noFill/>
         </p:spPr>
         <p:txBody>
-          <a:bodyPr wrap="none" lIns="0" rIns="0" tIns="0" bIns="0" anchor="ctr">
+          <a:bodyPr wrap="none" lIns="0" tIns="0" rIns="0" bIns="0" anchor="ctr">
             <a:spAutoFit/>
           </a:bodyPr>
           <a:lstStyle/>
           <a:p>
             <a:pPr algn="l"/>
             <a:r>
-              <a:rPr sz="1200" b="0">
+              <a:rPr sz="1200" b="0" dirty="0">
                 <a:solidFill>
                   <a:srgbClr val="182B2B"/>
                 </a:solidFill>
                 <a:latin typeface="Aptos"/>
               </a:rPr>
-              <a:t>11 оставшихся карточек по статусам Project; ST-04 в Review ещё не завершена. Throughput — 15 учебных значений, не скорость команды; статусы Project/Issues расходятся.</a:t>
+              <a:t>11 </a:t>
+            </a:r>
+            <a:r>
+              <a:rPr sz="1200" b="0" dirty="0" err="1">
+                <a:solidFill>
+                  <a:srgbClr val="182B2B"/>
+                </a:solidFill>
+                <a:latin typeface="Aptos"/>
+              </a:rPr>
+              <a:t>оставшихся</a:t>
+            </a:r>
+            <a:r>
+              <a:rPr sz="1200" b="0" dirty="0">
+                <a:solidFill>
+                  <a:srgbClr val="182B2B"/>
+                </a:solidFill>
+                <a:latin typeface="Aptos"/>
+              </a:rPr>
+              <a:t> </a:t>
+            </a:r>
+            <a:r>
+              <a:rPr sz="1200" b="0" dirty="0" err="1">
+                <a:solidFill>
+                  <a:srgbClr val="182B2B"/>
+                </a:solidFill>
+                <a:latin typeface="Aptos"/>
+              </a:rPr>
+              <a:t>карточек</a:t>
+            </a:r>
+            <a:r>
+              <a:rPr sz="1200" b="0" dirty="0">
+                <a:solidFill>
+                  <a:srgbClr val="182B2B"/>
+                </a:solidFill>
+                <a:latin typeface="Aptos"/>
+              </a:rPr>
+              <a:t> </a:t>
+            </a:r>
+            <a:r>
+              <a:rPr sz="1200" b="0" dirty="0" err="1">
+                <a:solidFill>
+                  <a:srgbClr val="182B2B"/>
+                </a:solidFill>
+                <a:latin typeface="Aptos"/>
+              </a:rPr>
+              <a:t>по</a:t>
+            </a:r>
+            <a:r>
+              <a:rPr sz="1200" b="0" dirty="0">
+                <a:solidFill>
+                  <a:srgbClr val="182B2B"/>
+                </a:solidFill>
+                <a:latin typeface="Aptos"/>
+              </a:rPr>
+              <a:t> </a:t>
+            </a:r>
+            <a:r>
+              <a:rPr sz="1200" b="0" dirty="0" err="1">
+                <a:solidFill>
+                  <a:srgbClr val="182B2B"/>
+                </a:solidFill>
+                <a:latin typeface="Aptos"/>
+              </a:rPr>
+              <a:t>статусам</a:t>
+            </a:r>
+            <a:r>
+              <a:rPr sz="1200" b="0" dirty="0">
+                <a:solidFill>
+                  <a:srgbClr val="182B2B"/>
+                </a:solidFill>
+                <a:latin typeface="Aptos"/>
+              </a:rPr>
+              <a:t> Project; ST-04 </a:t>
+            </a:r>
+            <a:r>
+              <a:rPr sz="1200" b="0" dirty="0" err="1">
+                <a:solidFill>
+                  <a:srgbClr val="182B2B"/>
+                </a:solidFill>
+                <a:latin typeface="Aptos"/>
+              </a:rPr>
+              <a:t>в</a:t>
+            </a:r>
+            <a:r>
+              <a:rPr sz="1200" b="0" dirty="0">
+                <a:solidFill>
+                  <a:srgbClr val="182B2B"/>
+                </a:solidFill>
+                <a:latin typeface="Aptos"/>
+              </a:rPr>
+              <a:t> Review </a:t>
+            </a:r>
+            <a:r>
+              <a:rPr sz="1200" b="0" dirty="0" err="1">
+                <a:solidFill>
+                  <a:srgbClr val="182B2B"/>
+                </a:solidFill>
+                <a:latin typeface="Aptos"/>
+              </a:rPr>
+              <a:t>ещё</a:t>
+            </a:r>
+            <a:r>
+              <a:rPr sz="1200" b="0" dirty="0">
+                <a:solidFill>
+                  <a:srgbClr val="182B2B"/>
+                </a:solidFill>
+                <a:latin typeface="Aptos"/>
+              </a:rPr>
+              <a:t> </a:t>
+            </a:r>
+            <a:r>
+              <a:rPr sz="1200" b="0" dirty="0" err="1">
+                <a:solidFill>
+                  <a:srgbClr val="182B2B"/>
+                </a:solidFill>
+                <a:latin typeface="Aptos"/>
+              </a:rPr>
+              <a:t>не</a:t>
+            </a:r>
+            <a:r>
+              <a:rPr sz="1200" b="0" dirty="0">
+                <a:solidFill>
+                  <a:srgbClr val="182B2B"/>
+                </a:solidFill>
+                <a:latin typeface="Aptos"/>
+              </a:rPr>
+              <a:t> </a:t>
+            </a:r>
+            <a:r>
+              <a:rPr sz="1200" b="0" dirty="0" err="1">
+                <a:solidFill>
+                  <a:srgbClr val="182B2B"/>
+                </a:solidFill>
+                <a:latin typeface="Aptos"/>
+              </a:rPr>
+              <a:t>завершена</a:t>
+            </a:r>
+            <a:r>
+              <a:rPr sz="1200" b="0" dirty="0">
+                <a:solidFill>
+                  <a:srgbClr val="182B2B"/>
+                </a:solidFill>
+                <a:latin typeface="Aptos"/>
+              </a:rPr>
+              <a:t>. </a:t>
+            </a:r>
+            <a:endParaRPr lang="en-US" sz="1200" b="0" dirty="0">
+              <a:solidFill>
+                <a:srgbClr val="182B2B"/>
+              </a:solidFill>
+              <a:latin typeface="Aptos"/>
+            </a:endParaRPr>
+          </a:p>
+          <a:p>
+            <a:pPr algn="l"/>
+            <a:r>
+              <a:rPr sz="1200" b="0" dirty="0">
+                <a:solidFill>
+                  <a:srgbClr val="182B2B"/>
+                </a:solidFill>
+                <a:latin typeface="Aptos"/>
+              </a:rPr>
+              <a:t>Throughput — 15 </a:t>
+            </a:r>
+            <a:r>
+              <a:rPr sz="1200" b="0" dirty="0" err="1">
+                <a:solidFill>
+                  <a:srgbClr val="182B2B"/>
+                </a:solidFill>
+                <a:latin typeface="Aptos"/>
+              </a:rPr>
+              <a:t>учебных</a:t>
+            </a:r>
+            <a:r>
+              <a:rPr sz="1200" b="0" dirty="0">
+                <a:solidFill>
+                  <a:srgbClr val="182B2B"/>
+                </a:solidFill>
+                <a:latin typeface="Aptos"/>
+              </a:rPr>
+              <a:t> </a:t>
+            </a:r>
+            <a:r>
+              <a:rPr sz="1200" b="0" dirty="0" err="1">
+                <a:solidFill>
+                  <a:srgbClr val="182B2B"/>
+                </a:solidFill>
+                <a:latin typeface="Aptos"/>
+              </a:rPr>
+              <a:t>значений</a:t>
+            </a:r>
+            <a:r>
+              <a:rPr sz="1200" b="0" dirty="0">
+                <a:solidFill>
+                  <a:srgbClr val="182B2B"/>
+                </a:solidFill>
+                <a:latin typeface="Aptos"/>
+              </a:rPr>
+              <a:t>, </a:t>
+            </a:r>
+            <a:r>
+              <a:rPr sz="1200" b="0" dirty="0" err="1">
+                <a:solidFill>
+                  <a:srgbClr val="182B2B"/>
+                </a:solidFill>
+                <a:latin typeface="Aptos"/>
+              </a:rPr>
+              <a:t>не</a:t>
+            </a:r>
+            <a:r>
+              <a:rPr sz="1200" b="0" dirty="0">
+                <a:solidFill>
+                  <a:srgbClr val="182B2B"/>
+                </a:solidFill>
+                <a:latin typeface="Aptos"/>
+              </a:rPr>
+              <a:t> </a:t>
+            </a:r>
+            <a:r>
+              <a:rPr sz="1200" b="0" dirty="0" err="1">
+                <a:solidFill>
+                  <a:srgbClr val="182B2B"/>
+                </a:solidFill>
+                <a:latin typeface="Aptos"/>
+              </a:rPr>
+              <a:t>скорость</a:t>
+            </a:r>
+            <a:r>
+              <a:rPr sz="1200" b="0" dirty="0">
+                <a:solidFill>
+                  <a:srgbClr val="182B2B"/>
+                </a:solidFill>
+                <a:latin typeface="Aptos"/>
+              </a:rPr>
+              <a:t> </a:t>
+            </a:r>
+            <a:r>
+              <a:rPr sz="1200" b="0" dirty="0" err="1">
+                <a:solidFill>
+                  <a:srgbClr val="182B2B"/>
+                </a:solidFill>
+                <a:latin typeface="Aptos"/>
+              </a:rPr>
+              <a:t>команды</a:t>
+            </a:r>
+            <a:r>
+              <a:rPr sz="1200" b="0" dirty="0">
+                <a:solidFill>
+                  <a:srgbClr val="182B2B"/>
+                </a:solidFill>
+                <a:latin typeface="Aptos"/>
+              </a:rPr>
+              <a:t>; </a:t>
+            </a:r>
+            <a:r>
+              <a:rPr sz="1200" b="0" dirty="0" err="1">
+                <a:solidFill>
+                  <a:srgbClr val="182B2B"/>
+                </a:solidFill>
+                <a:latin typeface="Aptos"/>
+              </a:rPr>
+              <a:t>статусы</a:t>
+            </a:r>
+            <a:r>
+              <a:rPr sz="1200" b="0" dirty="0">
+                <a:solidFill>
+                  <a:srgbClr val="182B2B"/>
+                </a:solidFill>
+                <a:latin typeface="Aptos"/>
+              </a:rPr>
+              <a:t> Project/Issues </a:t>
+            </a:r>
+            <a:r>
+              <a:rPr sz="1200" b="0" dirty="0" err="1">
+                <a:solidFill>
+                  <a:srgbClr val="182B2B"/>
+                </a:solidFill>
+                <a:latin typeface="Aptos"/>
+              </a:rPr>
+              <a:t>расходятся</a:t>
+            </a:r>
+            <a:r>
+              <a:rPr sz="1200" b="0" dirty="0">
+                <a:solidFill>
+                  <a:srgbClr val="182B2B"/>
+                </a:solidFill>
+                <a:latin typeface="Aptos"/>
+              </a:rPr>
+              <a:t>.</a:t>
             </a:r>
           </a:p>
         </p:txBody>
@@ -3826,6 +4373,7 @@
           <a:lstStyle/>
           <a:p>
             <a:pPr algn="ctr"/>
+            <a:endParaRPr/>
           </a:p>
         </p:txBody>
       </p:sp>
@@ -3846,7 +4394,7 @@
           <a:noFill/>
         </p:spPr>
         <p:txBody>
-          <a:bodyPr wrap="none" lIns="0" rIns="0" tIns="0" bIns="0" anchor="ctr">
+          <a:bodyPr wrap="none" lIns="0" tIns="0" rIns="0" bIns="0" anchor="ctr">
             <a:spAutoFit/>
           </a:bodyPr>
           <a:lstStyle/>
@@ -3881,7 +4429,7 @@
           <a:noFill/>
         </p:spPr>
         <p:txBody>
-          <a:bodyPr wrap="none" lIns="0" rIns="0" tIns="0" bIns="0" anchor="ctr">
+          <a:bodyPr wrap="none" lIns="0" tIns="0" rIns="0" bIns="0" anchor="ctr">
             <a:spAutoFit/>
           </a:bodyPr>
           <a:lstStyle/>
@@ -3941,6 +4489,7 @@
           <a:lstStyle/>
           <a:p>
             <a:pPr algn="ctr"/>
+            <a:endParaRPr/>
           </a:p>
         </p:txBody>
       </p:sp>
@@ -3961,7 +4510,7 @@
           <a:noFill/>
         </p:spPr>
         <p:txBody>
-          <a:bodyPr wrap="none" lIns="0" rIns="0" tIns="0" bIns="0" anchor="ctr">
+          <a:bodyPr wrap="none" lIns="0" tIns="0" rIns="0" bIns="0" anchor="ctr">
             <a:spAutoFit/>
           </a:bodyPr>
           <a:lstStyle/>
